--- a/판매용_템플릿/_판매팩/여행_스탠다드/06_메뉴구조.pptx
+++ b/판매용_템플릿/_판매팩/여행_스탠다드/06_메뉴구조.pptx
@@ -948,7 +948,7 @@
             </a:avLst>
           </a:prstGeom>
           <a:solidFill>
-            <a:srgbClr val="E4762C"/>
+            <a:srgbClr val="BC5918"/>
           </a:solidFill>
           <a:ln/>
         </p:spPr>
@@ -1442,7 +1442,7 @@
             </a:avLst>
           </a:prstGeom>
           <a:solidFill>
-            <a:srgbClr val="E4762C"/>
+            <a:srgbClr val="BC5918"/>
           </a:solidFill>
           <a:ln/>
         </p:spPr>
@@ -2188,7 +2188,7 @@
             </a:avLst>
           </a:prstGeom>
           <a:solidFill>
-            <a:srgbClr val="E4762C"/>
+            <a:srgbClr val="BC5918"/>
           </a:solidFill>
           <a:ln/>
         </p:spPr>
@@ -2430,7 +2430,7 @@
             </a:avLst>
           </a:prstGeom>
           <a:solidFill>
-            <a:srgbClr val="E4762C"/>
+            <a:srgbClr val="BC5918"/>
           </a:solidFill>
           <a:ln/>
         </p:spPr>
@@ -3008,7 +3008,7 @@
             </a:avLst>
           </a:prstGeom>
           <a:solidFill>
-            <a:srgbClr val="E4762C"/>
+            <a:srgbClr val="BC5918"/>
           </a:solidFill>
           <a:ln/>
         </p:spPr>
@@ -3418,7 +3418,7 @@
             </a:avLst>
           </a:prstGeom>
           <a:solidFill>
-            <a:srgbClr val="E4762C"/>
+            <a:srgbClr val="BC5918"/>
           </a:solidFill>
           <a:ln/>
         </p:spPr>
@@ -4584,7 +4584,7 @@
             </a:avLst>
           </a:prstGeom>
           <a:solidFill>
-            <a:srgbClr val="E4762C"/>
+            <a:srgbClr val="BC5918"/>
           </a:solidFill>
           <a:ln/>
         </p:spPr>
